--- a/Slides/CSC6032/Advanced-OS-03-DOS & NOS.pptx
+++ b/Slides/CSC6032/Advanced-OS-03-DOS & NOS.pptx
@@ -274,7 +274,7 @@
             <a:fld id="{45BDCE37-E9BE-4280-8D68-34E43D66CEDB}" type="datetimeFigureOut">
               <a:rPr lang="zh-TW" altLang="en-US" smtClean="0"/>
               <a:pPr/>
-              <a:t>2024/7/18</a:t>
+              <a:t>2026/9/21</a:t>
             </a:fld>
             <a:endParaRPr lang="zh-TW" altLang="en-US"/>
           </a:p>
@@ -441,7 +441,7 @@
             <a:fld id="{FBFBA883-381C-409E-9635-BB54B21745E4}" type="datetimeFigureOut">
               <a:rPr lang="zh-TW" altLang="en-US" smtClean="0"/>
               <a:pPr/>
-              <a:t>2024/7/18</a:t>
+              <a:t>2026/9/21</a:t>
             </a:fld>
             <a:endParaRPr lang="zh-TW" altLang="en-US"/>
           </a:p>
@@ -12757,6 +12757,8 @@
                     </a:srgbClr>
                   </a:outerShdw>
                 </a:effectLst>
+                <a:latin typeface="Times New Roman" panose="02020603050405020304" pitchFamily="18" charset="0"/>
+                <a:cs typeface="Times New Roman" panose="02020603050405020304" pitchFamily="18" charset="0"/>
               </a:rPr>
               <a:t>CSC</a:t>
             </a:r>
@@ -12769,6 +12771,8 @@
                     </a:srgbClr>
                   </a:outerShdw>
                 </a:effectLst>
+                <a:latin typeface="Times New Roman" panose="02020603050405020304" pitchFamily="18" charset="0"/>
+                <a:cs typeface="Times New Roman" panose="02020603050405020304" pitchFamily="18" charset="0"/>
               </a:rPr>
               <a:t>6032</a:t>
             </a:r>
@@ -12781,6 +12785,8 @@
                     </a:srgbClr>
                   </a:outerShdw>
                 </a:effectLst>
+                <a:latin typeface="Times New Roman" panose="02020603050405020304" pitchFamily="18" charset="0"/>
+                <a:cs typeface="Times New Roman" panose="02020603050405020304" pitchFamily="18" charset="0"/>
               </a:rPr>
               <a:t> – Advanced Operating Systems</a:t>
             </a:r>
@@ -12792,6 +12798,8 @@
                   </a:srgbClr>
                 </a:outerShdw>
               </a:effectLst>
+              <a:latin typeface="Times New Roman" panose="02020603050405020304" pitchFamily="18" charset="0"/>
+              <a:cs typeface="Times New Roman" panose="02020603050405020304" pitchFamily="18" charset="0"/>
             </a:endParaRPr>
           </a:p>
         </p:txBody>
@@ -12825,6 +12833,8 @@
                     </a:srgbClr>
                   </a:outerShdw>
                 </a:effectLst>
+                <a:latin typeface="Times New Roman" panose="02020603050405020304" pitchFamily="18" charset="0"/>
+                <a:cs typeface="Times New Roman" panose="02020603050405020304" pitchFamily="18" charset="0"/>
               </a:rPr>
               <a:t>Prof. </a:t>
             </a:r>
@@ -12837,6 +12847,8 @@
                     </a:srgbClr>
                   </a:outerShdw>
                 </a:effectLst>
+                <a:latin typeface="Times New Roman" panose="02020603050405020304" pitchFamily="18" charset="0"/>
+                <a:cs typeface="Times New Roman" panose="02020603050405020304" pitchFamily="18" charset="0"/>
               </a:rPr>
               <a:t>Yeh-Ching</a:t>
             </a:r>
@@ -12849,6 +12861,8 @@
                     </a:srgbClr>
                   </a:outerShdw>
                 </a:effectLst>
+                <a:latin typeface="Times New Roman" panose="02020603050405020304" pitchFamily="18" charset="0"/>
+                <a:cs typeface="Times New Roman" panose="02020603050405020304" pitchFamily="18" charset="0"/>
               </a:rPr>
               <a:t> Chung</a:t>
             </a:r>
@@ -12862,25 +12876,39 @@
                   </a:srgbClr>
                 </a:outerShdw>
               </a:effectLst>
+              <a:latin typeface="Times New Roman" panose="02020603050405020304" pitchFamily="18" charset="0"/>
+              <a:cs typeface="Times New Roman" panose="02020603050405020304" pitchFamily="18" charset="0"/>
             </a:endParaRPr>
           </a:p>
           <a:p>
             <a:r>
-              <a:rPr lang="en-US" altLang="zh-TW" sz="2400" dirty="0"/>
+              <a:rPr lang="en-US" altLang="zh-TW" sz="2400" dirty="0">
+                <a:latin typeface="Times New Roman" panose="02020603050405020304" pitchFamily="18" charset="0"/>
+                <a:cs typeface="Times New Roman" panose="02020603050405020304" pitchFamily="18" charset="0"/>
+              </a:rPr>
               <a:t>School of </a:t>
             </a:r>
             <a:r>
-              <a:rPr lang="en-US" altLang="zh-CN" sz="2400" dirty="0"/>
+              <a:rPr lang="en-US" altLang="zh-CN" sz="2400" dirty="0">
+                <a:latin typeface="Times New Roman" panose="02020603050405020304" pitchFamily="18" charset="0"/>
+                <a:cs typeface="Times New Roman" panose="02020603050405020304" pitchFamily="18" charset="0"/>
+              </a:rPr>
               <a:t>Data </a:t>
             </a:r>
             <a:r>
-              <a:rPr lang="en-US" altLang="zh-TW" sz="2400" dirty="0"/>
+              <a:rPr lang="en-US" altLang="zh-TW" sz="2400" dirty="0">
+                <a:latin typeface="Times New Roman" panose="02020603050405020304" pitchFamily="18" charset="0"/>
+                <a:cs typeface="Times New Roman" panose="02020603050405020304" pitchFamily="18" charset="0"/>
+              </a:rPr>
               <a:t>Science</a:t>
             </a:r>
           </a:p>
           <a:p>
             <a:r>
-              <a:rPr lang="en-US" altLang="zh-TW" sz="2400" dirty="0"/>
+              <a:rPr lang="en-US" altLang="zh-TW" sz="2400" dirty="0">
+                <a:latin typeface="Times New Roman" panose="02020603050405020304" pitchFamily="18" charset="0"/>
+                <a:cs typeface="Times New Roman" panose="02020603050405020304" pitchFamily="18" charset="0"/>
+              </a:rPr>
               <a:t>Chinese University of Hong Kong, Shenzhen</a:t>
             </a:r>
           </a:p>

--- a/Slides/CSC6032/Advanced-OS-03-DOS & NOS.pptx
+++ b/Slides/CSC6032/Advanced-OS-03-DOS & NOS.pptx
@@ -274,7 +274,7 @@
             <a:fld id="{45BDCE37-E9BE-4280-8D68-34E43D66CEDB}" type="datetimeFigureOut">
               <a:rPr lang="zh-TW" altLang="en-US" smtClean="0"/>
               <a:pPr/>
-              <a:t>2026/9/21</a:t>
+              <a:t>2026/9/28</a:t>
             </a:fld>
             <a:endParaRPr lang="zh-TW" altLang="en-US"/>
           </a:p>
@@ -441,7 +441,7 @@
             <a:fld id="{FBFBA883-381C-409E-9635-BB54B21745E4}" type="datetimeFigureOut">
               <a:rPr lang="zh-TW" altLang="en-US" smtClean="0"/>
               <a:pPr/>
-              <a:t>2026/9/21</a:t>
+              <a:t>2026/9/28</a:t>
             </a:fld>
             <a:endParaRPr lang="zh-TW" altLang="en-US"/>
           </a:p>
@@ -12790,6 +12790,33 @@
               </a:rPr>
               <a:t> – Advanced Operating Systems</a:t>
             </a:r>
+            <a:br>
+              <a:rPr lang="en-US" altLang="zh-TW" sz="3600" dirty="0">
+                <a:effectLst>
+                  <a:outerShdw blurRad="38100" dist="38100" dir="2700000" algn="tl">
+                    <a:srgbClr val="000000">
+                      <a:alpha val="43137"/>
+                    </a:srgbClr>
+                  </a:outerShdw>
+                </a:effectLst>
+                <a:latin typeface="Times New Roman" panose="02020603050405020304" pitchFamily="18" charset="0"/>
+                <a:cs typeface="Times New Roman" panose="02020603050405020304" pitchFamily="18" charset="0"/>
+              </a:rPr>
+            </a:br>
+            <a:r>
+              <a:rPr lang="en-US" altLang="zh-CN" sz="3600" dirty="0">
+                <a:effectLst>
+                  <a:outerShdw blurRad="38100" dist="38100" dir="2700000" algn="tl">
+                    <a:srgbClr val="000000">
+                      <a:alpha val="43137"/>
+                    </a:srgbClr>
+                  </a:outerShdw>
+                </a:effectLst>
+                <a:latin typeface="Times New Roman" panose="02020603050405020304" pitchFamily="18" charset="0"/>
+                <a:cs typeface="Times New Roman" panose="02020603050405020304" pitchFamily="18" charset="0"/>
+              </a:rPr>
+              <a:t>DOS &amp; NOS</a:t>
+            </a:r>
             <a:endParaRPr lang="zh-TW" altLang="en-US" sz="3600" dirty="0">
               <a:effectLst>
                 <a:outerShdw blurRad="38100" dist="38100" dir="2700000" algn="tl">
@@ -12960,13 +12987,29 @@
             <p:ph type="title"/>
           </p:nvPr>
         </p:nvSpPr>
-        <p:spPr/>
+        <p:spPr>
+          <a:xfrm>
+            <a:off x="922867" y="867177"/>
+            <a:ext cx="7488456" cy="519113"/>
+          </a:xfrm>
+        </p:spPr>
         <p:txBody>
           <a:bodyPr/>
           <a:lstStyle/>
           <a:p>
-            <a:r>
-              <a:rPr lang="en-US" altLang="en-US" dirty="0">
+            <a:pPr marL="342900" indent="-342900">
+              <a:buClr>
+                <a:srgbClr val="0000FF"/>
+              </a:buClr>
+              <a:buSzPct val="80000"/>
+              <a:buFont typeface="Wingdings" panose="05000000000000000000" pitchFamily="2" charset="2"/>
+              <a:buChar char="l"/>
+            </a:pPr>
+            <a:r>
+              <a:rPr lang="en-US" altLang="en-US" sz="2000" b="0" dirty="0">
+                <a:solidFill>
+                  <a:schemeClr val="tx1"/>
+                </a:solidFill>
                 <a:latin typeface="Times New Roman" panose="02020603050405020304" pitchFamily="18" charset="0"/>
                 <a:cs typeface="Times New Roman" panose="02020603050405020304" pitchFamily="18" charset="0"/>
               </a:rPr>
@@ -13004,8 +13047,8 @@
         </p:blipFill>
         <p:spPr bwMode="auto">
           <a:xfrm>
-            <a:off x="1509526" y="1123950"/>
-            <a:ext cx="5917593" cy="3270249"/>
+            <a:off x="2128205" y="1465852"/>
+            <a:ext cx="5298914" cy="2928347"/>
           </a:xfrm>
           <a:prstGeom prst="rect">
             <a:avLst/>
@@ -13062,6 +13105,199 @@
               <a:t>10</a:t>
             </a:fld>
             <a:endParaRPr lang="zh-TW" altLang="en-US"/>
+          </a:p>
+        </p:txBody>
+      </p:sp>
+      <p:sp>
+        <p:nvSpPr>
+          <p:cNvPr id="3" name="Title 1">
+            <a:extLst>
+              <a:ext uri="{FF2B5EF4-FFF2-40B4-BE49-F238E27FC236}">
+                <a16:creationId xmlns:a16="http://schemas.microsoft.com/office/drawing/2014/main" id="{8D1286BE-5B32-3175-7635-1F0D732F5585}"/>
+              </a:ext>
+            </a:extLst>
+          </p:cNvPr>
+          <p:cNvSpPr txBox="1">
+            <a:spLocks noChangeArrowheads="1"/>
+          </p:cNvSpPr>
+          <p:nvPr/>
+        </p:nvSpPr>
+        <p:spPr bwMode="auto">
+          <a:xfrm>
+            <a:off x="922867" y="108349"/>
+            <a:ext cx="7752823" cy="519113"/>
+          </a:xfrm>
+          <a:prstGeom prst="rect">
+            <a:avLst/>
+          </a:prstGeom>
+          <a:noFill/>
+          <a:ln w="9525">
+            <a:noFill/>
+            <a:miter lim="800000"/>
+            <a:headEnd/>
+            <a:tailEnd/>
+          </a:ln>
+        </p:spPr>
+        <p:txBody>
+          <a:bodyPr vert="horz" wrap="square" lIns="91440" tIns="45720" rIns="91440" bIns="45720" numCol="1" anchor="ctr" anchorCtr="0" compatLnSpc="1">
+            <a:prstTxWarp prst="textNoShape">
+              <a:avLst/>
+            </a:prstTxWarp>
+          </a:bodyPr>
+          <a:lstStyle>
+            <a:lvl1pPr algn="l" rtl="0" eaLnBrk="1" fontAlgn="base" hangingPunct="1">
+              <a:spcBef>
+                <a:spcPct val="0"/>
+              </a:spcBef>
+              <a:spcAft>
+                <a:spcPct val="0"/>
+              </a:spcAft>
+              <a:defRPr kumimoji="1" sz="3600" b="1">
+                <a:solidFill>
+                  <a:schemeClr val="tx2"/>
+                </a:solidFill>
+                <a:latin typeface="Calibri" pitchFamily="34" charset="0"/>
+                <a:ea typeface="標楷體" pitchFamily="65" charset="-120"/>
+                <a:cs typeface="+mj-cs"/>
+              </a:defRPr>
+            </a:lvl1pPr>
+            <a:lvl2pPr algn="l" rtl="0" eaLnBrk="1" fontAlgn="base" hangingPunct="1">
+              <a:spcBef>
+                <a:spcPct val="0"/>
+              </a:spcBef>
+              <a:spcAft>
+                <a:spcPct val="0"/>
+              </a:spcAft>
+              <a:defRPr kumimoji="1" sz="2700" b="1">
+                <a:solidFill>
+                  <a:schemeClr val="tx2"/>
+                </a:solidFill>
+                <a:latin typeface="Calibri" pitchFamily="34" charset="0"/>
+                <a:ea typeface="標楷體" pitchFamily="65" charset="-120"/>
+                <a:cs typeface="MS Sans Serif"/>
+              </a:defRPr>
+            </a:lvl2pPr>
+            <a:lvl3pPr algn="l" rtl="0" eaLnBrk="1" fontAlgn="base" hangingPunct="1">
+              <a:spcBef>
+                <a:spcPct val="0"/>
+              </a:spcBef>
+              <a:spcAft>
+                <a:spcPct val="0"/>
+              </a:spcAft>
+              <a:defRPr kumimoji="1" sz="2700" b="1">
+                <a:solidFill>
+                  <a:schemeClr val="tx2"/>
+                </a:solidFill>
+                <a:latin typeface="Calibri" pitchFamily="34" charset="0"/>
+                <a:ea typeface="標楷體" pitchFamily="65" charset="-120"/>
+                <a:cs typeface="MS Sans Serif"/>
+              </a:defRPr>
+            </a:lvl3pPr>
+            <a:lvl4pPr algn="l" rtl="0" eaLnBrk="1" fontAlgn="base" hangingPunct="1">
+              <a:spcBef>
+                <a:spcPct val="0"/>
+              </a:spcBef>
+              <a:spcAft>
+                <a:spcPct val="0"/>
+              </a:spcAft>
+              <a:defRPr kumimoji="1" sz="2700" b="1">
+                <a:solidFill>
+                  <a:schemeClr val="tx2"/>
+                </a:solidFill>
+                <a:latin typeface="Calibri" pitchFamily="34" charset="0"/>
+                <a:ea typeface="標楷體" pitchFamily="65" charset="-120"/>
+                <a:cs typeface="MS Sans Serif"/>
+              </a:defRPr>
+            </a:lvl4pPr>
+            <a:lvl5pPr algn="l" rtl="0" eaLnBrk="1" fontAlgn="base" hangingPunct="1">
+              <a:spcBef>
+                <a:spcPct val="0"/>
+              </a:spcBef>
+              <a:spcAft>
+                <a:spcPct val="0"/>
+              </a:spcAft>
+              <a:defRPr kumimoji="1" sz="2700" b="1">
+                <a:solidFill>
+                  <a:schemeClr val="tx2"/>
+                </a:solidFill>
+                <a:latin typeface="Calibri" pitchFamily="34" charset="0"/>
+                <a:ea typeface="標楷體" pitchFamily="65" charset="-120"/>
+                <a:cs typeface="MS Sans Serif"/>
+              </a:defRPr>
+            </a:lvl5pPr>
+            <a:lvl6pPr marL="342891" algn="l" rtl="0" eaLnBrk="1" fontAlgn="base" hangingPunct="1">
+              <a:spcBef>
+                <a:spcPct val="0"/>
+              </a:spcBef>
+              <a:spcAft>
+                <a:spcPct val="0"/>
+              </a:spcAft>
+              <a:defRPr kumimoji="1" sz="2251" b="1">
+                <a:solidFill>
+                  <a:schemeClr val="tx2"/>
+                </a:solidFill>
+                <a:latin typeface="MS Sans Serif"/>
+                <a:ea typeface="MS Sans Serif"/>
+                <a:cs typeface="MS Sans Serif"/>
+              </a:defRPr>
+            </a:lvl6pPr>
+            <a:lvl7pPr marL="685783" algn="l" rtl="0" eaLnBrk="1" fontAlgn="base" hangingPunct="1">
+              <a:spcBef>
+                <a:spcPct val="0"/>
+              </a:spcBef>
+              <a:spcAft>
+                <a:spcPct val="0"/>
+              </a:spcAft>
+              <a:defRPr kumimoji="1" sz="2251" b="1">
+                <a:solidFill>
+                  <a:schemeClr val="tx2"/>
+                </a:solidFill>
+                <a:latin typeface="MS Sans Serif"/>
+                <a:ea typeface="MS Sans Serif"/>
+                <a:cs typeface="MS Sans Serif"/>
+              </a:defRPr>
+            </a:lvl7pPr>
+            <a:lvl8pPr marL="1028674" algn="l" rtl="0" eaLnBrk="1" fontAlgn="base" hangingPunct="1">
+              <a:spcBef>
+                <a:spcPct val="0"/>
+              </a:spcBef>
+              <a:spcAft>
+                <a:spcPct val="0"/>
+              </a:spcAft>
+              <a:defRPr kumimoji="1" sz="2251" b="1">
+                <a:solidFill>
+                  <a:schemeClr val="tx2"/>
+                </a:solidFill>
+                <a:latin typeface="MS Sans Serif"/>
+                <a:ea typeface="MS Sans Serif"/>
+                <a:cs typeface="MS Sans Serif"/>
+              </a:defRPr>
+            </a:lvl8pPr>
+            <a:lvl9pPr marL="1371566" algn="l" rtl="0" eaLnBrk="1" fontAlgn="base" hangingPunct="1">
+              <a:spcBef>
+                <a:spcPct val="0"/>
+              </a:spcBef>
+              <a:spcAft>
+                <a:spcPct val="0"/>
+              </a:spcAft>
+              <a:defRPr kumimoji="1" sz="2251" b="1">
+                <a:solidFill>
+                  <a:schemeClr val="tx2"/>
+                </a:solidFill>
+                <a:latin typeface="MS Sans Serif"/>
+                <a:ea typeface="MS Sans Serif"/>
+                <a:cs typeface="MS Sans Serif"/>
+              </a:defRPr>
+            </a:lvl9pPr>
+          </a:lstStyle>
+          <a:p>
+            <a:r>
+              <a:rPr lang="en-US" altLang="en-US" kern="0" dirty="0">
+                <a:latin typeface="Times New Roman" panose="02020603050405020304" pitchFamily="18" charset="0"/>
+                <a:cs typeface="Times New Roman" panose="02020603050405020304" pitchFamily="18" charset="0"/>
+              </a:rPr>
+              <a:t>Network Structure (4)</a:t>
+            </a:r>
           </a:p>
         </p:txBody>
       </p:sp>
@@ -13106,7 +13342,12 @@
             <p:ph type="title"/>
           </p:nvPr>
         </p:nvSpPr>
-        <p:spPr/>
+        <p:spPr>
+          <a:xfrm>
+            <a:off x="905933" y="108349"/>
+            <a:ext cx="7769757" cy="519113"/>
+          </a:xfrm>
+        </p:spPr>
         <p:txBody>
           <a:bodyPr/>
           <a:lstStyle/>
@@ -13143,13 +13384,13 @@
               </a:ext>
             </a:extLst>
           </a:blip>
-          <a:srcRect l="8509"/>
+          <a:srcRect l="8509" b="11064"/>
           <a:stretch/>
         </p:blipFill>
         <p:spPr bwMode="auto">
           <a:xfrm>
-            <a:off x="5604933" y="1418826"/>
-            <a:ext cx="3368149" cy="2435397"/>
+            <a:off x="5307541" y="1402643"/>
+            <a:ext cx="3720485" cy="2392522"/>
           </a:xfrm>
           <a:prstGeom prst="rect">
             <a:avLst/>
@@ -13227,8 +13468,8 @@
         </p:nvSpPr>
         <p:spPr>
           <a:xfrm>
-            <a:off x="778936" y="794939"/>
-            <a:ext cx="4605865" cy="3398044"/>
+            <a:off x="541791" y="852332"/>
+            <a:ext cx="4605865" cy="3042351"/>
           </a:xfrm>
         </p:spPr>
         <p:txBody>
@@ -13315,8 +13556,8 @@
         </p:nvSpPr>
         <p:spPr>
           <a:xfrm>
-            <a:off x="833967" y="834156"/>
-            <a:ext cx="7476066" cy="3542923"/>
+            <a:off x="999066" y="834156"/>
+            <a:ext cx="7519291" cy="3542923"/>
           </a:xfrm>
         </p:spPr>
         <p:txBody>
@@ -13393,7 +13634,12 @@
             <p:ph type="title"/>
           </p:nvPr>
         </p:nvSpPr>
-        <p:spPr/>
+        <p:spPr>
+          <a:xfrm>
+            <a:off x="905933" y="108349"/>
+            <a:ext cx="7769757" cy="519113"/>
+          </a:xfrm>
+        </p:spPr>
         <p:txBody>
           <a:bodyPr/>
           <a:lstStyle/>
@@ -13481,8 +13727,8 @@
         </p:nvSpPr>
         <p:spPr>
           <a:xfrm>
-            <a:off x="889001" y="810622"/>
-            <a:ext cx="7484532" cy="3589990"/>
+            <a:off x="982133" y="810622"/>
+            <a:ext cx="7391400" cy="3589990"/>
           </a:xfrm>
         </p:spPr>
         <p:txBody>
@@ -13566,7 +13812,12 @@
             <p:ph type="title"/>
           </p:nvPr>
         </p:nvSpPr>
-        <p:spPr/>
+        <p:spPr>
+          <a:xfrm>
+            <a:off x="889001" y="108349"/>
+            <a:ext cx="7786689" cy="519113"/>
+          </a:xfrm>
+        </p:spPr>
         <p:txBody>
           <a:bodyPr/>
           <a:lstStyle/>
@@ -13974,8 +14225,8 @@
         </p:blipFill>
         <p:spPr bwMode="auto">
           <a:xfrm>
-            <a:off x="3562350" y="935832"/>
-            <a:ext cx="2369344" cy="3593306"/>
+            <a:off x="3562349" y="837397"/>
+            <a:ext cx="2446943" cy="3710991"/>
           </a:xfrm>
           <a:prstGeom prst="rect">
             <a:avLst/>
@@ -14021,7 +14272,12 @@
             <p:ph type="title"/>
           </p:nvPr>
         </p:nvSpPr>
-        <p:spPr/>
+        <p:spPr>
+          <a:xfrm>
+            <a:off x="922867" y="108349"/>
+            <a:ext cx="7752823" cy="519113"/>
+          </a:xfrm>
+        </p:spPr>
         <p:txBody>
           <a:bodyPr/>
           <a:lstStyle/>
@@ -14253,7 +14509,12 @@
             <p:ph type="title"/>
           </p:nvPr>
         </p:nvSpPr>
-        <p:spPr/>
+        <p:spPr>
+          <a:xfrm>
+            <a:off x="863598" y="108349"/>
+            <a:ext cx="7812092" cy="519113"/>
+          </a:xfrm>
+        </p:spPr>
         <p:txBody>
           <a:bodyPr/>
           <a:lstStyle/>
@@ -14286,7 +14547,7 @@
         </p:nvSpPr>
         <p:spPr>
           <a:xfrm>
-            <a:off x="863598" y="815047"/>
+            <a:off x="914400" y="815047"/>
             <a:ext cx="7543800" cy="3646884"/>
           </a:xfrm>
         </p:spPr>
@@ -14464,8 +14725,8 @@
         </p:nvSpPr>
         <p:spPr>
           <a:xfrm>
-            <a:off x="787401" y="108349"/>
-            <a:ext cx="8102599" cy="519113"/>
+            <a:off x="897467" y="108349"/>
+            <a:ext cx="7992533" cy="519113"/>
           </a:xfrm>
         </p:spPr>
         <p:txBody>
@@ -14553,7 +14814,12 @@
             <p:ph type="title"/>
           </p:nvPr>
         </p:nvSpPr>
-        <p:spPr/>
+        <p:spPr>
+          <a:xfrm>
+            <a:off x="872067" y="108349"/>
+            <a:ext cx="7803623" cy="519113"/>
+          </a:xfrm>
+        </p:spPr>
         <p:txBody>
           <a:bodyPr/>
           <a:lstStyle/>
@@ -14586,7 +14852,7 @@
         </p:nvSpPr>
         <p:spPr>
           <a:xfrm>
-            <a:off x="787402" y="872728"/>
+            <a:off x="872067" y="872728"/>
             <a:ext cx="7888288" cy="3398044"/>
           </a:xfrm>
         </p:spPr>
@@ -14928,7 +15194,12 @@
             <p:ph type="title"/>
           </p:nvPr>
         </p:nvSpPr>
-        <p:spPr/>
+        <p:spPr>
+          <a:xfrm>
+            <a:off x="855131" y="108349"/>
+            <a:ext cx="7820559" cy="519113"/>
+          </a:xfrm>
+        </p:spPr>
         <p:txBody>
           <a:bodyPr/>
           <a:lstStyle/>
@@ -14961,8 +15232,8 @@
         </p:nvSpPr>
         <p:spPr>
           <a:xfrm>
-            <a:off x="855131" y="807576"/>
-            <a:ext cx="7484534" cy="3596084"/>
+            <a:off x="982133" y="807576"/>
+            <a:ext cx="7357532" cy="3596084"/>
           </a:xfrm>
         </p:spPr>
         <p:txBody>
@@ -15158,7 +15429,12 @@
             <p:ph type="title"/>
           </p:nvPr>
         </p:nvSpPr>
-        <p:spPr/>
+        <p:spPr>
+          <a:xfrm>
+            <a:off x="889000" y="108349"/>
+            <a:ext cx="7786690" cy="519113"/>
+          </a:xfrm>
+        </p:spPr>
         <p:txBody>
           <a:bodyPr/>
           <a:lstStyle/>
@@ -15304,7 +15580,12 @@
             <p:ph type="title"/>
           </p:nvPr>
         </p:nvSpPr>
-        <p:spPr/>
+        <p:spPr>
+          <a:xfrm>
+            <a:off x="886358" y="108349"/>
+            <a:ext cx="7789332" cy="519113"/>
+          </a:xfrm>
+        </p:spPr>
         <p:txBody>
           <a:bodyPr/>
           <a:lstStyle/>
@@ -15337,8 +15618,8 @@
         </p:nvSpPr>
         <p:spPr>
           <a:xfrm>
-            <a:off x="829736" y="804996"/>
-            <a:ext cx="7789332" cy="3690807"/>
+            <a:off x="886358" y="804996"/>
+            <a:ext cx="7732710" cy="3690807"/>
           </a:xfrm>
         </p:spPr>
         <p:txBody>
@@ -15550,7 +15831,12 @@
             <p:ph type="title"/>
           </p:nvPr>
         </p:nvSpPr>
-        <p:spPr/>
+        <p:spPr>
+          <a:xfrm>
+            <a:off x="872067" y="108349"/>
+            <a:ext cx="7803623" cy="519113"/>
+          </a:xfrm>
+        </p:spPr>
         <p:txBody>
           <a:bodyPr/>
           <a:lstStyle/>
@@ -15583,8 +15869,8 @@
         </p:nvSpPr>
         <p:spPr>
           <a:xfrm>
-            <a:off x="872067" y="858903"/>
-            <a:ext cx="7196668" cy="3425693"/>
+            <a:off x="981776" y="858903"/>
+            <a:ext cx="7247823" cy="3425693"/>
           </a:xfrm>
         </p:spPr>
         <p:txBody>
@@ -15720,7 +16006,12 @@
             <p:ph type="title"/>
           </p:nvPr>
         </p:nvSpPr>
-        <p:spPr/>
+        <p:spPr>
+          <a:xfrm>
+            <a:off x="914400" y="108349"/>
+            <a:ext cx="7761290" cy="519113"/>
+          </a:xfrm>
+        </p:spPr>
         <p:txBody>
           <a:bodyPr/>
           <a:lstStyle/>
@@ -15866,7 +16157,12 @@
             <p:ph type="title"/>
           </p:nvPr>
         </p:nvSpPr>
-        <p:spPr/>
+        <p:spPr>
+          <a:xfrm>
+            <a:off x="940600" y="108349"/>
+            <a:ext cx="7735089" cy="519113"/>
+          </a:xfrm>
+        </p:spPr>
         <p:txBody>
           <a:bodyPr/>
           <a:lstStyle/>
@@ -15899,7 +16195,7 @@
         </p:nvSpPr>
         <p:spPr>
           <a:xfrm>
-            <a:off x="863600" y="832976"/>
+            <a:off x="940601" y="832976"/>
             <a:ext cx="7552266" cy="3545284"/>
           </a:xfrm>
         </p:spPr>
@@ -16037,7 +16333,12 @@
             <p:ph type="title"/>
           </p:nvPr>
         </p:nvSpPr>
-        <p:spPr/>
+        <p:spPr>
+          <a:xfrm>
+            <a:off x="904775" y="108349"/>
+            <a:ext cx="7770915" cy="519113"/>
+          </a:xfrm>
+        </p:spPr>
         <p:txBody>
           <a:bodyPr/>
           <a:lstStyle/>
@@ -16185,8 +16486,8 @@
         </p:nvSpPr>
         <p:spPr>
           <a:xfrm>
-            <a:off x="753534" y="188578"/>
-            <a:ext cx="7298266" cy="432197"/>
+            <a:off x="914400" y="188578"/>
+            <a:ext cx="7137400" cy="432197"/>
           </a:xfrm>
         </p:spPr>
         <p:txBody>
@@ -16198,7 +16499,7 @@
                 <a:latin typeface="Times New Roman" panose="02020603050405020304" pitchFamily="18" charset="0"/>
                 <a:cs typeface="Times New Roman" panose="02020603050405020304" pitchFamily="18" charset="0"/>
               </a:rPr>
-              <a:t> Transmission Control Protocol</a:t>
+              <a:t>Transmission Control Protocol</a:t>
             </a:r>
           </a:p>
         </p:txBody>
@@ -16221,8 +16522,8 @@
         </p:nvSpPr>
         <p:spPr>
           <a:xfrm>
-            <a:off x="753534" y="872728"/>
-            <a:ext cx="7687731" cy="2403872"/>
+            <a:off x="981777" y="872727"/>
+            <a:ext cx="7709836" cy="3237259"/>
           </a:xfrm>
         </p:spPr>
         <p:txBody>
@@ -16361,8 +16662,8 @@
         </p:nvSpPr>
         <p:spPr>
           <a:xfrm>
-            <a:off x="838200" y="76223"/>
-            <a:ext cx="7967134" cy="548024"/>
+            <a:off x="905934" y="76223"/>
+            <a:ext cx="7899400" cy="548024"/>
           </a:xfrm>
         </p:spPr>
         <p:txBody>
@@ -16528,8 +16829,8 @@
         </p:nvSpPr>
         <p:spPr>
           <a:xfrm>
-            <a:off x="905933" y="108349"/>
-            <a:ext cx="7769757" cy="519113"/>
+            <a:off x="885525" y="108349"/>
+            <a:ext cx="7790166" cy="519113"/>
           </a:xfrm>
         </p:spPr>
         <p:txBody>
@@ -16853,7 +17154,7 @@
                 <a:latin typeface="Times New Roman" panose="02020603050405020304" pitchFamily="18" charset="0"/>
                 <a:cs typeface="Times New Roman" panose="02020603050405020304" pitchFamily="18" charset="0"/>
               </a:rPr>
-              <a:t> Explain the advantages of networked and distributed systems</a:t>
+              <a:t>Explain the advantages of networked and distributed systems</a:t>
             </a:r>
           </a:p>
           <a:p>
@@ -16862,7 +17163,7 @@
                 <a:latin typeface="Times New Roman" panose="02020603050405020304" pitchFamily="18" charset="0"/>
                 <a:cs typeface="Times New Roman" panose="02020603050405020304" pitchFamily="18" charset="0"/>
               </a:rPr>
-              <a:t> Provide a high-level overview of the networks that interconnect distributed systems</a:t>
+              <a:t>Provide a high-level overview of the networks that interconnect distributed systems</a:t>
             </a:r>
           </a:p>
           <a:p>
@@ -16956,7 +17257,12 @@
             <p:ph type="title"/>
           </p:nvPr>
         </p:nvSpPr>
-        <p:spPr/>
+        <p:spPr>
+          <a:xfrm>
+            <a:off x="905933" y="108349"/>
+            <a:ext cx="7769757" cy="519113"/>
+          </a:xfrm>
+        </p:spPr>
         <p:txBody>
           <a:bodyPr/>
           <a:lstStyle/>
@@ -16989,7 +17295,7 @@
         </p:nvSpPr>
         <p:spPr>
           <a:xfrm>
-            <a:off x="905933" y="823512"/>
+            <a:off x="969433" y="872728"/>
             <a:ext cx="7205134" cy="3398044"/>
           </a:xfrm>
         </p:spPr>
@@ -17147,7 +17453,7 @@
                 <a:latin typeface="Times New Roman" panose="02020603050405020304" pitchFamily="18" charset="0"/>
                 <a:cs typeface="Times New Roman" panose="02020603050405020304" pitchFamily="18" charset="0"/>
               </a:rPr>
-              <a:t>Distributed-Operating Systems (2) </a:t>
+              <a:t>Distributed Operating Systems (2) </a:t>
             </a:r>
           </a:p>
         </p:txBody>
@@ -17170,7 +17476,7 @@
         </p:nvSpPr>
         <p:spPr>
           <a:xfrm>
-            <a:off x="804335" y="815046"/>
+            <a:off x="1011766" y="815046"/>
             <a:ext cx="7611533" cy="3655353"/>
           </a:xfrm>
         </p:spPr>
@@ -17495,8 +17801,8 @@
         </p:nvSpPr>
         <p:spPr>
           <a:xfrm>
-            <a:off x="829733" y="108349"/>
-            <a:ext cx="7845957" cy="519113"/>
+            <a:off x="990601" y="108349"/>
+            <a:ext cx="7685089" cy="519113"/>
           </a:xfrm>
         </p:spPr>
         <p:txBody>
@@ -17531,7 +17837,7 @@
         </p:nvSpPr>
         <p:spPr>
           <a:xfrm>
-            <a:off x="910166" y="872728"/>
+            <a:off x="990601" y="872728"/>
             <a:ext cx="7685089" cy="3398044"/>
           </a:xfrm>
         </p:spPr>
@@ -17664,7 +17970,12 @@
             <p:ph type="title"/>
           </p:nvPr>
         </p:nvSpPr>
-        <p:spPr/>
+        <p:spPr>
+          <a:xfrm>
+            <a:off x="943276" y="108349"/>
+            <a:ext cx="7732414" cy="519113"/>
+          </a:xfrm>
+        </p:spPr>
         <p:txBody>
           <a:bodyPr/>
           <a:lstStyle/>
@@ -17697,7 +18008,7 @@
         </p:nvSpPr>
         <p:spPr>
           <a:xfrm>
-            <a:off x="872066" y="813459"/>
+            <a:off x="1046049" y="803834"/>
             <a:ext cx="7526867" cy="3398044"/>
           </a:xfrm>
         </p:spPr>
@@ -17871,8 +18182,8 @@
         </p:nvSpPr>
         <p:spPr>
           <a:xfrm>
-            <a:off x="863600" y="108349"/>
-            <a:ext cx="7812090" cy="519113"/>
+            <a:off x="933650" y="108349"/>
+            <a:ext cx="7742039" cy="519113"/>
           </a:xfrm>
         </p:spPr>
         <p:txBody>
@@ -18254,7 +18565,7 @@
         </p:nvSpPr>
         <p:spPr>
           <a:xfrm>
-            <a:off x="804334" y="874316"/>
+            <a:off x="1027379" y="883941"/>
             <a:ext cx="7535332" cy="2910284"/>
           </a:xfrm>
         </p:spPr>
@@ -18576,8 +18887,8 @@
         </p:nvSpPr>
         <p:spPr>
           <a:xfrm>
-            <a:off x="838200" y="108349"/>
-            <a:ext cx="7837490" cy="519113"/>
+            <a:off x="931332" y="108349"/>
+            <a:ext cx="7744357" cy="519113"/>
           </a:xfrm>
         </p:spPr>
         <p:txBody>
@@ -18612,8 +18923,8 @@
         </p:nvSpPr>
         <p:spPr>
           <a:xfrm>
-            <a:off x="931333" y="823515"/>
-            <a:ext cx="7086600" cy="2385351"/>
+            <a:off x="1028699" y="833140"/>
+            <a:ext cx="7086601" cy="2385351"/>
           </a:xfrm>
         </p:spPr>
         <p:txBody>
@@ -18986,7 +19297,7 @@
         </p:nvSpPr>
         <p:spPr>
           <a:xfrm>
-            <a:off x="931333" y="806581"/>
+            <a:off x="1027586" y="806581"/>
             <a:ext cx="7357534" cy="3714617"/>
           </a:xfrm>
         </p:spPr>
@@ -19137,8 +19448,8 @@
         </p:nvSpPr>
         <p:spPr>
           <a:xfrm>
-            <a:off x="880533" y="108349"/>
-            <a:ext cx="7795157" cy="519113"/>
+            <a:off x="944033" y="108349"/>
+            <a:ext cx="7731657" cy="519113"/>
           </a:xfrm>
         </p:spPr>
         <p:txBody>
@@ -19173,8 +19484,8 @@
         </p:nvSpPr>
         <p:spPr>
           <a:xfrm>
-            <a:off x="944033" y="838200"/>
-            <a:ext cx="7255934" cy="3307160"/>
+            <a:off x="1058779" y="838200"/>
+            <a:ext cx="7141188" cy="3307160"/>
           </a:xfrm>
         </p:spPr>
         <p:txBody>
@@ -19312,7 +19623,12 @@
             <p:ph type="title"/>
           </p:nvPr>
         </p:nvSpPr>
-        <p:spPr/>
+        <p:spPr>
+          <a:xfrm>
+            <a:off x="866274" y="108349"/>
+            <a:ext cx="7809416" cy="519113"/>
+          </a:xfrm>
+        </p:spPr>
         <p:txBody>
           <a:bodyPr/>
           <a:lstStyle/>
@@ -19345,7 +19661,7 @@
         </p:nvSpPr>
         <p:spPr>
           <a:xfrm>
-            <a:off x="787401" y="798116"/>
+            <a:off x="918634" y="798116"/>
             <a:ext cx="7306732" cy="3398044"/>
           </a:xfrm>
         </p:spPr>
@@ -19517,7 +19833,12 @@
             <p:ph type="title"/>
           </p:nvPr>
         </p:nvSpPr>
-        <p:spPr/>
+        <p:spPr>
+          <a:xfrm>
+            <a:off x="933651" y="108349"/>
+            <a:ext cx="7742039" cy="519113"/>
+          </a:xfrm>
+        </p:spPr>
         <p:txBody>
           <a:bodyPr/>
           <a:lstStyle/>
@@ -19668,7 +19989,12 @@
             <p:ph type="title"/>
           </p:nvPr>
         </p:nvSpPr>
-        <p:spPr/>
+        <p:spPr>
+          <a:xfrm>
+            <a:off x="893233" y="108349"/>
+            <a:ext cx="7782457" cy="519113"/>
+          </a:xfrm>
+        </p:spPr>
         <p:txBody>
           <a:bodyPr/>
           <a:lstStyle/>
@@ -19701,7 +20027,7 @@
         </p:nvSpPr>
         <p:spPr>
           <a:xfrm>
-            <a:off x="893233" y="872728"/>
+            <a:off x="989485" y="872728"/>
             <a:ext cx="7357533" cy="3398044"/>
           </a:xfrm>
         </p:spPr>
@@ -19864,7 +20190,12 @@
             <p:ph type="title"/>
           </p:nvPr>
         </p:nvSpPr>
-        <p:spPr/>
+        <p:spPr>
+          <a:xfrm>
+            <a:off x="866274" y="108349"/>
+            <a:ext cx="7809416" cy="519113"/>
+          </a:xfrm>
+        </p:spPr>
         <p:txBody>
           <a:bodyPr/>
           <a:lstStyle/>
@@ -19908,7 +20239,7 @@
         </p:blipFill>
         <p:spPr bwMode="auto">
           <a:xfrm>
-            <a:off x="1807346" y="1109132"/>
+            <a:off x="1877167" y="891116"/>
             <a:ext cx="5389665" cy="3361267"/>
           </a:xfrm>
           <a:prstGeom prst="rect">
@@ -20015,7 +20346,12 @@
             <p:ph type="title"/>
           </p:nvPr>
         </p:nvSpPr>
-        <p:spPr/>
+        <p:spPr>
+          <a:xfrm>
+            <a:off x="952901" y="108349"/>
+            <a:ext cx="7722789" cy="519113"/>
+          </a:xfrm>
+        </p:spPr>
         <p:txBody>
           <a:bodyPr/>
           <a:lstStyle/>
@@ -20048,8 +20384,8 @@
         </p:nvSpPr>
         <p:spPr>
           <a:xfrm>
-            <a:off x="711200" y="789646"/>
-            <a:ext cx="8060267" cy="3756954"/>
+            <a:off x="952901" y="789646"/>
+            <a:ext cx="7818566" cy="3756954"/>
           </a:xfrm>
         </p:spPr>
         <p:txBody>
@@ -20390,7 +20726,12 @@
             <p:ph type="title"/>
           </p:nvPr>
         </p:nvSpPr>
-        <p:spPr/>
+        <p:spPr>
+          <a:xfrm>
+            <a:off x="982133" y="108349"/>
+            <a:ext cx="7693557" cy="519113"/>
+          </a:xfrm>
+        </p:spPr>
         <p:txBody>
           <a:bodyPr/>
           <a:lstStyle/>
@@ -20605,8 +20946,8 @@
         </p:nvSpPr>
         <p:spPr>
           <a:xfrm>
-            <a:off x="897467" y="108349"/>
-            <a:ext cx="7778223" cy="519113"/>
+            <a:off x="1007533" y="108349"/>
+            <a:ext cx="7668157" cy="519113"/>
           </a:xfrm>
         </p:spPr>
         <p:txBody>
@@ -20809,8 +21150,8 @@
         </p:nvSpPr>
         <p:spPr>
           <a:xfrm>
-            <a:off x="897467" y="781182"/>
-            <a:ext cx="7535333" cy="3398044"/>
+            <a:off x="987228" y="781182"/>
+            <a:ext cx="7445572" cy="3398044"/>
           </a:xfrm>
         </p:spPr>
         <p:txBody>
@@ -20856,7 +21197,7 @@
             <a:r>
               <a:rPr lang="en-US" altLang="en-US" sz="2000" dirty="0">
                 <a:solidFill>
-                  <a:srgbClr val="006699"/>
+                  <a:srgbClr val="FF0000"/>
                 </a:solidFill>
                 <a:latin typeface="Times New Roman" panose="02020603050405020304" pitchFamily="18" charset="0"/>
                 <a:cs typeface="Times New Roman" panose="02020603050405020304" pitchFamily="18" charset="0"/>
@@ -20949,8 +21290,8 @@
         </p:nvSpPr>
         <p:spPr>
           <a:xfrm>
-            <a:off x="897467" y="108349"/>
-            <a:ext cx="7778223" cy="519113"/>
+            <a:off x="933651" y="108349"/>
+            <a:ext cx="7742039" cy="519113"/>
           </a:xfrm>
         </p:spPr>
         <p:txBody>
@@ -21114,7 +21455,12 @@
             <p:ph type="title"/>
           </p:nvPr>
         </p:nvSpPr>
-        <p:spPr/>
+        <p:spPr>
+          <a:xfrm>
+            <a:off x="880533" y="108349"/>
+            <a:ext cx="7795157" cy="519113"/>
+          </a:xfrm>
+        </p:spPr>
         <p:txBody>
           <a:bodyPr/>
           <a:lstStyle/>
@@ -21724,7 +22070,12 @@
             <p:ph type="title"/>
           </p:nvPr>
         </p:nvSpPr>
-        <p:spPr/>
+        <p:spPr>
+          <a:xfrm>
+            <a:off x="939800" y="108349"/>
+            <a:ext cx="7735890" cy="519113"/>
+          </a:xfrm>
+        </p:spPr>
         <p:txBody>
           <a:bodyPr/>
           <a:lstStyle/>
@@ -21757,7 +22108,7 @@
         </p:nvSpPr>
         <p:spPr>
           <a:xfrm>
-            <a:off x="939800" y="925116"/>
+            <a:off x="1044311" y="944367"/>
             <a:ext cx="7526867" cy="3398044"/>
           </a:xfrm>
         </p:spPr>
@@ -21909,7 +22260,12 @@
             <p:ph type="title"/>
           </p:nvPr>
         </p:nvSpPr>
-        <p:spPr/>
+        <p:spPr>
+          <a:xfrm>
+            <a:off x="866274" y="108349"/>
+            <a:ext cx="7809416" cy="519113"/>
+          </a:xfrm>
+        </p:spPr>
         <p:txBody>
           <a:bodyPr/>
           <a:lstStyle/>
@@ -22121,7 +22477,12 @@
             <p:ph type="title"/>
           </p:nvPr>
         </p:nvSpPr>
-        <p:spPr/>
+        <p:spPr>
+          <a:xfrm>
+            <a:off x="883177" y="108349"/>
+            <a:ext cx="7792513" cy="519113"/>
+          </a:xfrm>
+        </p:spPr>
         <p:txBody>
           <a:bodyPr/>
           <a:lstStyle/>
@@ -22154,7 +22515,7 @@
         </p:nvSpPr>
         <p:spPr>
           <a:xfrm>
-            <a:off x="883177" y="813459"/>
+            <a:off x="1000388" y="821552"/>
             <a:ext cx="7558090" cy="3640005"/>
           </a:xfrm>
         </p:spPr>
@@ -22350,7 +22711,7 @@
                 <a:latin typeface="Times New Roman" panose="02020603050405020304" pitchFamily="18" charset="0"/>
                 <a:cs typeface="Times New Roman" panose="02020603050405020304" pitchFamily="18" charset="0"/>
               </a:rPr>
-              <a:t>Network Structure</a:t>
+              <a:t>Network Structure (1)</a:t>
             </a:r>
           </a:p>
         </p:txBody>
@@ -22538,16 +22899,27 @@
         </p:nvSpPr>
         <p:spPr>
           <a:xfrm>
-            <a:off x="846667" y="108349"/>
-            <a:ext cx="7829023" cy="519113"/>
+            <a:off x="1011505" y="824825"/>
+            <a:ext cx="7491191" cy="519113"/>
           </a:xfrm>
         </p:spPr>
         <p:txBody>
           <a:bodyPr/>
           <a:lstStyle/>
           <a:p>
-            <a:r>
-              <a:rPr lang="en-US" altLang="en-US" dirty="0">
+            <a:pPr marL="342900" indent="-342900">
+              <a:buClr>
+                <a:srgbClr val="0000FF"/>
+              </a:buClr>
+              <a:buSzPct val="80000"/>
+              <a:buFont typeface="Wingdings" panose="05000000000000000000" pitchFamily="2" charset="2"/>
+              <a:buChar char="l"/>
+            </a:pPr>
+            <a:r>
+              <a:rPr lang="en-US" altLang="en-US" sz="2000" b="0" dirty="0">
+                <a:solidFill>
+                  <a:schemeClr val="tx1"/>
+                </a:solidFill>
                 <a:latin typeface="Times New Roman" panose="02020603050405020304" pitchFamily="18" charset="0"/>
                 <a:cs typeface="Times New Roman" panose="02020603050405020304" pitchFamily="18" charset="0"/>
               </a:rPr>
@@ -22583,8 +22955,8 @@
         </p:blipFill>
         <p:spPr bwMode="auto">
           <a:xfrm>
-            <a:off x="1820334" y="1030271"/>
-            <a:ext cx="5545666" cy="3406262"/>
+            <a:off x="2516622" y="1457945"/>
+            <a:ext cx="4849377" cy="2978587"/>
           </a:xfrm>
           <a:prstGeom prst="rect">
             <a:avLst/>
@@ -22641,6 +23013,199 @@
               <a:t>8</a:t>
             </a:fld>
             <a:endParaRPr lang="zh-TW" altLang="en-US"/>
+          </a:p>
+        </p:txBody>
+      </p:sp>
+      <p:sp>
+        <p:nvSpPr>
+          <p:cNvPr id="3" name="Title 1">
+            <a:extLst>
+              <a:ext uri="{FF2B5EF4-FFF2-40B4-BE49-F238E27FC236}">
+                <a16:creationId xmlns:a16="http://schemas.microsoft.com/office/drawing/2014/main" id="{811BB52B-E951-AEC0-8287-22AC06D6561F}"/>
+              </a:ext>
+            </a:extLst>
+          </p:cNvPr>
+          <p:cNvSpPr txBox="1">
+            <a:spLocks noChangeArrowheads="1"/>
+          </p:cNvSpPr>
+          <p:nvPr/>
+        </p:nvSpPr>
+        <p:spPr bwMode="auto">
+          <a:xfrm>
+            <a:off x="922867" y="108349"/>
+            <a:ext cx="7752823" cy="519113"/>
+          </a:xfrm>
+          <a:prstGeom prst="rect">
+            <a:avLst/>
+          </a:prstGeom>
+          <a:noFill/>
+          <a:ln w="9525">
+            <a:noFill/>
+            <a:miter lim="800000"/>
+            <a:headEnd/>
+            <a:tailEnd/>
+          </a:ln>
+        </p:spPr>
+        <p:txBody>
+          <a:bodyPr vert="horz" wrap="square" lIns="91440" tIns="45720" rIns="91440" bIns="45720" numCol="1" anchor="ctr" anchorCtr="0" compatLnSpc="1">
+            <a:prstTxWarp prst="textNoShape">
+              <a:avLst/>
+            </a:prstTxWarp>
+          </a:bodyPr>
+          <a:lstStyle>
+            <a:lvl1pPr algn="l" rtl="0" eaLnBrk="1" fontAlgn="base" hangingPunct="1">
+              <a:spcBef>
+                <a:spcPct val="0"/>
+              </a:spcBef>
+              <a:spcAft>
+                <a:spcPct val="0"/>
+              </a:spcAft>
+              <a:defRPr kumimoji="1" sz="3600" b="1">
+                <a:solidFill>
+                  <a:schemeClr val="tx2"/>
+                </a:solidFill>
+                <a:latin typeface="Calibri" pitchFamily="34" charset="0"/>
+                <a:ea typeface="標楷體" pitchFamily="65" charset="-120"/>
+                <a:cs typeface="+mj-cs"/>
+              </a:defRPr>
+            </a:lvl1pPr>
+            <a:lvl2pPr algn="l" rtl="0" eaLnBrk="1" fontAlgn="base" hangingPunct="1">
+              <a:spcBef>
+                <a:spcPct val="0"/>
+              </a:spcBef>
+              <a:spcAft>
+                <a:spcPct val="0"/>
+              </a:spcAft>
+              <a:defRPr kumimoji="1" sz="2700" b="1">
+                <a:solidFill>
+                  <a:schemeClr val="tx2"/>
+                </a:solidFill>
+                <a:latin typeface="Calibri" pitchFamily="34" charset="0"/>
+                <a:ea typeface="標楷體" pitchFamily="65" charset="-120"/>
+                <a:cs typeface="MS Sans Serif"/>
+              </a:defRPr>
+            </a:lvl2pPr>
+            <a:lvl3pPr algn="l" rtl="0" eaLnBrk="1" fontAlgn="base" hangingPunct="1">
+              <a:spcBef>
+                <a:spcPct val="0"/>
+              </a:spcBef>
+              <a:spcAft>
+                <a:spcPct val="0"/>
+              </a:spcAft>
+              <a:defRPr kumimoji="1" sz="2700" b="1">
+                <a:solidFill>
+                  <a:schemeClr val="tx2"/>
+                </a:solidFill>
+                <a:latin typeface="Calibri" pitchFamily="34" charset="0"/>
+                <a:ea typeface="標楷體" pitchFamily="65" charset="-120"/>
+                <a:cs typeface="MS Sans Serif"/>
+              </a:defRPr>
+            </a:lvl3pPr>
+            <a:lvl4pPr algn="l" rtl="0" eaLnBrk="1" fontAlgn="base" hangingPunct="1">
+              <a:spcBef>
+                <a:spcPct val="0"/>
+              </a:spcBef>
+              <a:spcAft>
+                <a:spcPct val="0"/>
+              </a:spcAft>
+              <a:defRPr kumimoji="1" sz="2700" b="1">
+                <a:solidFill>
+                  <a:schemeClr val="tx2"/>
+                </a:solidFill>
+                <a:latin typeface="Calibri" pitchFamily="34" charset="0"/>
+                <a:ea typeface="標楷體" pitchFamily="65" charset="-120"/>
+                <a:cs typeface="MS Sans Serif"/>
+              </a:defRPr>
+            </a:lvl4pPr>
+            <a:lvl5pPr algn="l" rtl="0" eaLnBrk="1" fontAlgn="base" hangingPunct="1">
+              <a:spcBef>
+                <a:spcPct val="0"/>
+              </a:spcBef>
+              <a:spcAft>
+                <a:spcPct val="0"/>
+              </a:spcAft>
+              <a:defRPr kumimoji="1" sz="2700" b="1">
+                <a:solidFill>
+                  <a:schemeClr val="tx2"/>
+                </a:solidFill>
+                <a:latin typeface="Calibri" pitchFamily="34" charset="0"/>
+                <a:ea typeface="標楷體" pitchFamily="65" charset="-120"/>
+                <a:cs typeface="MS Sans Serif"/>
+              </a:defRPr>
+            </a:lvl5pPr>
+            <a:lvl6pPr marL="342891" algn="l" rtl="0" eaLnBrk="1" fontAlgn="base" hangingPunct="1">
+              <a:spcBef>
+                <a:spcPct val="0"/>
+              </a:spcBef>
+              <a:spcAft>
+                <a:spcPct val="0"/>
+              </a:spcAft>
+              <a:defRPr kumimoji="1" sz="2251" b="1">
+                <a:solidFill>
+                  <a:schemeClr val="tx2"/>
+                </a:solidFill>
+                <a:latin typeface="MS Sans Serif"/>
+                <a:ea typeface="MS Sans Serif"/>
+                <a:cs typeface="MS Sans Serif"/>
+              </a:defRPr>
+            </a:lvl6pPr>
+            <a:lvl7pPr marL="685783" algn="l" rtl="0" eaLnBrk="1" fontAlgn="base" hangingPunct="1">
+              <a:spcBef>
+                <a:spcPct val="0"/>
+              </a:spcBef>
+              <a:spcAft>
+                <a:spcPct val="0"/>
+              </a:spcAft>
+              <a:defRPr kumimoji="1" sz="2251" b="1">
+                <a:solidFill>
+                  <a:schemeClr val="tx2"/>
+                </a:solidFill>
+                <a:latin typeface="MS Sans Serif"/>
+                <a:ea typeface="MS Sans Serif"/>
+                <a:cs typeface="MS Sans Serif"/>
+              </a:defRPr>
+            </a:lvl7pPr>
+            <a:lvl8pPr marL="1028674" algn="l" rtl="0" eaLnBrk="1" fontAlgn="base" hangingPunct="1">
+              <a:spcBef>
+                <a:spcPct val="0"/>
+              </a:spcBef>
+              <a:spcAft>
+                <a:spcPct val="0"/>
+              </a:spcAft>
+              <a:defRPr kumimoji="1" sz="2251" b="1">
+                <a:solidFill>
+                  <a:schemeClr val="tx2"/>
+                </a:solidFill>
+                <a:latin typeface="MS Sans Serif"/>
+                <a:ea typeface="MS Sans Serif"/>
+                <a:cs typeface="MS Sans Serif"/>
+              </a:defRPr>
+            </a:lvl8pPr>
+            <a:lvl9pPr marL="1371566" algn="l" rtl="0" eaLnBrk="1" fontAlgn="base" hangingPunct="1">
+              <a:spcBef>
+                <a:spcPct val="0"/>
+              </a:spcBef>
+              <a:spcAft>
+                <a:spcPct val="0"/>
+              </a:spcAft>
+              <a:defRPr kumimoji="1" sz="2251" b="1">
+                <a:solidFill>
+                  <a:schemeClr val="tx2"/>
+                </a:solidFill>
+                <a:latin typeface="MS Sans Serif"/>
+                <a:ea typeface="MS Sans Serif"/>
+                <a:cs typeface="MS Sans Serif"/>
+              </a:defRPr>
+            </a:lvl9pPr>
+          </a:lstStyle>
+          <a:p>
+            <a:r>
+              <a:rPr lang="en-US" altLang="en-US" kern="0" dirty="0">
+                <a:latin typeface="Times New Roman" panose="02020603050405020304" pitchFamily="18" charset="0"/>
+                <a:cs typeface="Times New Roman" panose="02020603050405020304" pitchFamily="18" charset="0"/>
+              </a:rPr>
+              <a:t>Network Structure (2)</a:t>
+            </a:r>
           </a:p>
         </p:txBody>
       </p:sp>
@@ -22700,7 +23265,7 @@
                 <a:latin typeface="Times New Roman" panose="02020603050405020304" pitchFamily="18" charset="0"/>
                 <a:cs typeface="Times New Roman" panose="02020603050405020304" pitchFamily="18" charset="0"/>
               </a:rPr>
-              <a:t>Network Structure</a:t>
+              <a:t>Network Structure (3)</a:t>
             </a:r>
           </a:p>
         </p:txBody>
